--- a/1차 Project(Flask,머신러닝)/3. 화면 설계서.pptx
+++ b/1차 Project(Flask,머신러닝)/3. 화면 설계서.pptx
@@ -115,11 +115,7 @@
 <file path=ppt/revisionInfo.xml><?xml version="1.0" encoding="utf-8"?>
 <p1510:revInfo xmlns:a="http://schemas.openxmlformats.org/drawingml/2006/main" xmlns:r="http://schemas.openxmlformats.org/officeDocument/2006/relationships" xmlns:p1510="http://schemas.microsoft.com/office/powerpoint/2015/10/main">
   <p1510:revLst>
-    <p1510:client id="{5810DA75-14E7-4A7B-A597-21DFA0A3B34C}" v="1056" dt="2026-03-20T06:58:43.950"/>
-    <p1510:client id="{6D75943B-ED69-4622-A6A0-E59B158AFEE9}" v="761" dt="2026-03-20T06:14:17.887"/>
-    <p1510:client id="{A3B05A1E-47E9-43DD-9558-CCBA50829151}" v="283" dt="2026-03-20T07:06:12.221"/>
-    <p1510:client id="{D327AE30-57F7-4774-8924-6D42A1ACF074}" v="545" dt="2026-03-20T01:38:51.973"/>
-    <p1510:client id="{E94B1781-80C5-45B0-A137-0B853E0DA802}" v="998" dt="2026-03-20T07:33:18.227"/>
+    <p1510:client id="{D7E6C69C-AF91-49D6-B5B9-D1BE06A46DE8}" v="11" dt="2026-04-09T02:19:04.379"/>
   </p1510:revLst>
 </p1510:revInfo>
 </file>
@@ -349,7 +345,7 @@
           <a:p>
             <a:fld id="{2566825D-2B69-4989-8861-A6901ABADB6C}" type="datetimeFigureOut">
               <a:rPr lang="ko-KR" altLang="en-US" smtClean="0"/>
-              <a:t>2026-03-20</a:t>
+              <a:t>2026-04-08</a:t>
             </a:fld>
             <a:endParaRPr lang="ko-KR" altLang="en-US"/>
           </a:p>
@@ -517,7 +513,7 @@
           <a:p>
             <a:fld id="{2566825D-2B69-4989-8861-A6901ABADB6C}" type="datetimeFigureOut">
               <a:rPr lang="ko-KR" altLang="en-US" smtClean="0"/>
-              <a:t>2026-03-20</a:t>
+              <a:t>2026-04-08</a:t>
             </a:fld>
             <a:endParaRPr lang="ko-KR" altLang="en-US"/>
           </a:p>
@@ -695,7 +691,7 @@
           <a:p>
             <a:fld id="{2566825D-2B69-4989-8861-A6901ABADB6C}" type="datetimeFigureOut">
               <a:rPr lang="ko-KR" altLang="en-US" smtClean="0"/>
-              <a:t>2026-03-20</a:t>
+              <a:t>2026-04-08</a:t>
             </a:fld>
             <a:endParaRPr lang="ko-KR" altLang="en-US"/>
           </a:p>
@@ -863,7 +859,7 @@
           <a:p>
             <a:fld id="{2566825D-2B69-4989-8861-A6901ABADB6C}" type="datetimeFigureOut">
               <a:rPr lang="ko-KR" altLang="en-US" smtClean="0"/>
-              <a:t>2026-03-20</a:t>
+              <a:t>2026-04-08</a:t>
             </a:fld>
             <a:endParaRPr lang="ko-KR" altLang="en-US"/>
           </a:p>
@@ -1108,7 +1104,7 @@
           <a:p>
             <a:fld id="{2566825D-2B69-4989-8861-A6901ABADB6C}" type="datetimeFigureOut">
               <a:rPr lang="ko-KR" altLang="en-US" smtClean="0"/>
-              <a:t>2026-03-20</a:t>
+              <a:t>2026-04-08</a:t>
             </a:fld>
             <a:endParaRPr lang="ko-KR" altLang="en-US"/>
           </a:p>
@@ -1337,7 +1333,7 @@
           <a:p>
             <a:fld id="{2566825D-2B69-4989-8861-A6901ABADB6C}" type="datetimeFigureOut">
               <a:rPr lang="ko-KR" altLang="en-US" smtClean="0"/>
-              <a:t>2026-03-20</a:t>
+              <a:t>2026-04-08</a:t>
             </a:fld>
             <a:endParaRPr lang="ko-KR" altLang="en-US"/>
           </a:p>
@@ -1701,7 +1697,7 @@
           <a:p>
             <a:fld id="{2566825D-2B69-4989-8861-A6901ABADB6C}" type="datetimeFigureOut">
               <a:rPr lang="ko-KR" altLang="en-US" smtClean="0"/>
-              <a:t>2026-03-20</a:t>
+              <a:t>2026-04-08</a:t>
             </a:fld>
             <a:endParaRPr lang="ko-KR" altLang="en-US"/>
           </a:p>
@@ -1818,7 +1814,7 @@
           <a:p>
             <a:fld id="{2566825D-2B69-4989-8861-A6901ABADB6C}" type="datetimeFigureOut">
               <a:rPr lang="ko-KR" altLang="en-US" smtClean="0"/>
-              <a:t>2026-03-20</a:t>
+              <a:t>2026-04-08</a:t>
             </a:fld>
             <a:endParaRPr lang="ko-KR" altLang="en-US"/>
           </a:p>
@@ -1913,7 +1909,7 @@
           <a:p>
             <a:fld id="{2566825D-2B69-4989-8861-A6901ABADB6C}" type="datetimeFigureOut">
               <a:rPr lang="ko-KR" altLang="en-US" smtClean="0"/>
-              <a:t>2026-03-20</a:t>
+              <a:t>2026-04-08</a:t>
             </a:fld>
             <a:endParaRPr lang="ko-KR" altLang="en-US"/>
           </a:p>
@@ -2188,7 +2184,7 @@
           <a:p>
             <a:fld id="{2566825D-2B69-4989-8861-A6901ABADB6C}" type="datetimeFigureOut">
               <a:rPr lang="ko-KR" altLang="en-US" smtClean="0"/>
-              <a:t>2026-03-20</a:t>
+              <a:t>2026-04-08</a:t>
             </a:fld>
             <a:endParaRPr lang="ko-KR" altLang="en-US"/>
           </a:p>
@@ -2440,7 +2436,7 @@
           <a:p>
             <a:fld id="{2566825D-2B69-4989-8861-A6901ABADB6C}" type="datetimeFigureOut">
               <a:rPr lang="ko-KR" altLang="en-US" smtClean="0"/>
-              <a:t>2026-03-20</a:t>
+              <a:t>2026-04-08</a:t>
             </a:fld>
             <a:endParaRPr lang="ko-KR" altLang="en-US"/>
           </a:p>
@@ -2651,7 +2647,7 @@
           <a:p>
             <a:fld id="{2566825D-2B69-4989-8861-A6901ABADB6C}" type="datetimeFigureOut">
               <a:rPr lang="ko-KR" altLang="en-US" smtClean="0"/>
-              <a:t>2026-03-20</a:t>
+              <a:t>2026-04-08</a:t>
             </a:fld>
             <a:endParaRPr lang="ko-KR" altLang="en-US"/>
           </a:p>
@@ -4012,7 +4008,7 @@
       </p:graphicFrame>
       <p:pic>
         <p:nvPicPr>
-          <p:cNvPr id="2" name="그림 1" descr="텍스트, 스크린샷, 폰트, 브랜드이(가) 표시된 사진&#10;&#10;AI 생성 콘텐츠는 정확하지 않을 수 있습니다.">
+          <p:cNvPr id="2" name="그림 1" descr="텍스트, 스크린샷, 폰트, 디자인이(가) 표시된 사진&#10;&#10;AI 생성 콘텐츠는 정확하지 않을 수 있습니다.">
             <a:extLst>
               <a:ext uri="{FF2B5EF4-FFF2-40B4-BE49-F238E27FC236}">
                 <a16:creationId xmlns:a16="http://schemas.microsoft.com/office/drawing/2014/main" id="{D9A03DF6-3669-6760-2C05-15A07A1A1953}"/>
@@ -4032,12 +4028,17 @@
         </p:blipFill>
         <p:spPr>
           <a:xfrm>
-            <a:off x="362565" y="1133851"/>
-            <a:ext cx="9242325" cy="5217105"/>
+            <a:off x="362565" y="1168673"/>
+            <a:ext cx="9242325" cy="5147461"/>
           </a:xfrm>
           <a:prstGeom prst="rect">
             <a:avLst/>
           </a:prstGeom>
+          <a:ln w="12700">
+            <a:solidFill>
+              <a:schemeClr val="tx1"/>
+            </a:solidFill>
+          </a:ln>
         </p:spPr>
       </p:pic>
       <p:sp>
@@ -7865,6 +7866,11 @@
           <a:prstGeom prst="rect">
             <a:avLst/>
           </a:prstGeom>
+          <a:ln w="12700">
+            <a:solidFill>
+              <a:schemeClr val="tx1"/>
+            </a:solidFill>
+          </a:ln>
         </p:spPr>
       </p:pic>
       <p:sp>
@@ -9421,6 +9427,11 @@
           <a:prstGeom prst="rect">
             <a:avLst/>
           </a:prstGeom>
+          <a:ln w="12700">
+            <a:solidFill>
+              <a:schemeClr val="tx1"/>
+            </a:solidFill>
+          </a:ln>
         </p:spPr>
       </p:pic>
       <p:sp>
@@ -12029,6 +12040,11 @@
           <a:prstGeom prst="rect">
             <a:avLst/>
           </a:prstGeom>
+          <a:ln w="12700">
+            <a:solidFill>
+              <a:schemeClr val="tx1"/>
+            </a:solidFill>
+          </a:ln>
         </p:spPr>
       </p:pic>
       <p:sp>
@@ -14084,6 +14100,11 @@
           <a:prstGeom prst="rect">
             <a:avLst/>
           </a:prstGeom>
+          <a:ln w="12700">
+            <a:solidFill>
+              <a:schemeClr val="tx1"/>
+            </a:solidFill>
+          </a:ln>
         </p:spPr>
       </p:pic>
       <p:sp>
